--- a/_presentations/Y9_Python/L3_While_Loops.pptx
+++ b/_presentations/Y9_Python/L3_While_Loops.pptx
@@ -126,19 +126,19 @@
   <p:extLst>
     <p:ext uri="{521415D9-36F7-43E2-AB2F-B90AF26B5E84}">
       <p14:sectionLst xmlns:p14="http://schemas.microsoft.com/office/powerpoint/2010/main">
-        <p14:section name="Recap &amp; Recall" id="{1964c26e-3c3d-3b83-c2bd-9b14e3fb323a}">
+        <p14:section name="Recap &amp; Recall" id="{09fd49c7-761b-17f7-188f-347a72a9ef38}">
           <p14:sldIdLst>
             <p14:sldId id="256"/>
             <p14:sldId id="257"/>
           </p14:sldIdLst>
         </p14:section>
-        <p14:section name="Title" id="{cbb08cf3-31dd-52ec-1540-428630e62564}">
+        <p14:section name="Title" id="{b78d03af-18f6-b465-6096-3768205745a2}">
           <p14:sldIdLst>
             <p14:sldId id="258"/>
             <p14:sldId id="259"/>
           </p14:sldIdLst>
         </p14:section>
-        <p14:section name="Iteration" id="{c2b81037-510a-1847-067b-3fdce5b8ed47}">
+        <p14:section name="Iteration" id="{fe769597-9400-2148-7a92-ef3f9f9dd743}">
           <p14:sldIdLst>
             <p14:sldId id="260"/>
             <p14:sldId id="261"/>
@@ -147,7 +147,7 @@
             <p14:sldId id="264"/>
           </p14:sldIdLst>
         </p14:section>
-        <p14:section name="Round 1 — counting" id="{7a4323d5-7f2a-8d93-bb74-2b69131f366c}">
+        <p14:section name="Round 1 — counting" id="{3ead5979-8091-eee3-aa46-108707ddb8bb}">
           <p14:sldIdLst>
             <p14:sldId id="265"/>
             <p14:sldId id="266"/>
@@ -156,24 +156,24 @@
             <p14:sldId id="269"/>
           </p14:sldIdLst>
         </p14:section>
-        <p14:section name="Round 2 — input()" id="{f201a7e5-5e45-d1eb-ab79-9f9586d50c50}">
+        <p14:section name="Round 2 — input()" id="{c0c3aa6f-bc06-1dbd-bdd5-3216f780c9cf}">
           <p14:sldIdLst>
             <p14:sldId id="270"/>
             <p14:sldId id="271"/>
           </p14:sldIdLst>
         </p14:section>
-        <p14:section name="Numbers into text" id="{3efb5a80-04de-a21f-083e-d4f0ac71a2d3}">
+        <p14:section name="Numbers into text" id="{fcc87a2c-cc0c-e155-3162-7053a7da9f07}">
           <p14:sldIdLst>
             <p14:sldId id="272"/>
           </p14:sldIdLst>
         </p14:section>
-        <p14:section name="Locked In" id="{1fca3721-6148-517d-29d8-7cdd01a9ed5e}">
+        <p14:section name="Locked In" id="{3dea5715-2065-8d76-ad8f-3c791b10f17c}">
           <p14:sldIdLst>
             <p14:sldId id="273"/>
             <p14:sldId id="274"/>
           </p14:sldIdLst>
         </p14:section>
-        <p14:section name="Plenary" id="{b617c175-2a1f-01e9-0f91-058b1aff7406}">
+        <p14:section name="Plenary" id="{da50c2aa-68bf-376d-427b-1a75208fa26f}">
           <p14:sldIdLst>
             <p14:sldId id="275"/>
           </p14:sldIdLst>
@@ -951,7 +951,7 @@
               <a:rPr lang="en-US" dirty="0"/>
               <a:t>YOU DO — silent, on your own, 4 minutes. Boards up together at the end.
 Stuck? Draw a trace table like the last two slides: one row per check.
-Number 2 is the trap: the condition is checked BEFORE the first pass. Number 3: look at the spaces in front of print.</a:t>
+Number 2 is the trap: the condition is checked BEFORE the loop runs even once. Number 3: look at the spaces in front of print.</a:t>
             </a:r>
             <a:endParaRPr lang="en-US" dirty="0"/>
           </a:p>
@@ -1041,7 +1041,7 @@
               <a:rPr lang="en-US" dirty="0"/>
               <a:t>Check boards. Most common mistakes:
 1: "1 2 3 4" — after 3 prints, n becomes 4, and 4 &lt;= 3 is False, so it stops.
-2: "5, End" — 5 &lt; 5 is False before the first pass, so the body NEVER runs. A while can run zero times.
+2: "5, End" — 5 &lt; 5 is False straight away, so the body NEVER runs. A while can run zero times.
 3: "2 4 6" — print(n) isn't indented, so it's not in the loop: it runs once, after the loop, when n is 6.
 If most of the class got 2 or 3 wrong, trace one more together before Round 2.</a:t>
             </a:r>
@@ -1131,7 +1131,7 @@
           <a:p>
             <a:r>
               <a:rPr lang="en-US" dirty="0"/>
-              <a:t>I DO — the airlock keypad, the same program as today's activity. Now the variable changes because the USER types something new each pass.
+              <a:t>I DO — the airlock keypad, the same program as today's activity. Now the variable changes because the USER types something new each time round.
 Click 1 — "Line 1 asks: 1234. Is "1234" != "4271"? Yes, True. ACCESS DENIED, then line 4 asks again: 0000."
 Click 2 — "0000 != 4271? True. ACCESS DENIED, ask again: 4271."
 Click 3 — "4271 != 4271? False. The loop ends: Airlock open."
@@ -32410,7 +32410,7 @@
                 <a:ea typeface="Calibri" pitchFamily="34" charset="-122"/>
                 <a:cs typeface="Calibri" pitchFamily="34" charset="-120"/>
               </a:rPr>
-              <a:t>Checks again before every pass</a:t>
+              <a:t>Checks again each time round</a:t>
             </a:r>
             <a:endParaRPr lang="en-US" sz="2200" dirty="0"/>
           </a:p>
